--- a/images/template.pptx
+++ b/images/template.pptx
@@ -125,7 +125,7 @@
   <pc:docChgLst>
     <pc:chgData name="風間 洋介" userId="a9b98ff0-f5fa-4bb4-8594-ce54d338978c" providerId="ADAL" clId="{54E13F58-F74D-4EDD-93E2-5D6766F3A879}"/>
     <pc:docChg chg="undo custSel addSld delSld modSld modMainMaster">
-      <pc:chgData name="風間 洋介" userId="a9b98ff0-f5fa-4bb4-8594-ce54d338978c" providerId="ADAL" clId="{54E13F58-F74D-4EDD-93E2-5D6766F3A879}" dt="2026-07-22T01:35:25.972" v="164" actId="478"/>
+      <pc:chgData name="風間 洋介" userId="a9b98ff0-f5fa-4bb4-8594-ce54d338978c" providerId="ADAL" clId="{54E13F58-F74D-4EDD-93E2-5D6766F3A879}" dt="2026-07-22T08:01:25.883" v="169" actId="14100"/>
       <pc:docMkLst>
         <pc:docMk/>
       </pc:docMkLst>
@@ -144,8 +144,8 @@
           </ac:picMkLst>
         </pc:picChg>
       </pc:sldChg>
-      <pc:sldChg chg="modSp new mod">
-        <pc:chgData name="風間 洋介" userId="a9b98ff0-f5fa-4bb4-8594-ce54d338978c" providerId="ADAL" clId="{54E13F58-F74D-4EDD-93E2-5D6766F3A879}" dt="2026-07-22T01:32:36.168" v="163" actId="122"/>
+      <pc:sldChg chg="delSp modSp new mod">
+        <pc:chgData name="風間 洋介" userId="a9b98ff0-f5fa-4bb4-8594-ce54d338978c" providerId="ADAL" clId="{54E13F58-F74D-4EDD-93E2-5D6766F3A879}" dt="2026-07-22T08:01:06.328" v="165" actId="478"/>
         <pc:sldMkLst>
           <pc:docMk/>
           <pc:sldMk cId="760836144" sldId="257"/>
@@ -158,15 +158,31 @@
             <ac:spMk id="3" creationId="{946611E3-CFC8-E660-C859-C82073BE8A94}"/>
           </ac:spMkLst>
         </pc:spChg>
+        <pc:spChg chg="del">
+          <ac:chgData name="風間 洋介" userId="a9b98ff0-f5fa-4bb4-8594-ce54d338978c" providerId="ADAL" clId="{54E13F58-F74D-4EDD-93E2-5D6766F3A879}" dt="2026-07-22T08:01:05.124" v="164" actId="478"/>
+          <ac:spMkLst>
+            <pc:docMk/>
+            <pc:sldMk cId="760836144" sldId="257"/>
+            <ac:spMk id="10" creationId="{9EABB194-665B-5421-CE4D-9A5EAD0FE877}"/>
+          </ac:spMkLst>
+        </pc:spChg>
+        <pc:spChg chg="del">
+          <ac:chgData name="風間 洋介" userId="a9b98ff0-f5fa-4bb4-8594-ce54d338978c" providerId="ADAL" clId="{54E13F58-F74D-4EDD-93E2-5D6766F3A879}" dt="2026-07-22T08:01:06.328" v="165" actId="478"/>
+          <ac:spMkLst>
+            <pc:docMk/>
+            <pc:sldMk cId="760836144" sldId="257"/>
+            <ac:spMk id="12" creationId="{E59A1499-85AD-4F77-2197-EA1BEBB948FE}"/>
+          </ac:spMkLst>
+        </pc:spChg>
       </pc:sldChg>
       <pc:sldMasterChg chg="modSldLayout">
-        <pc:chgData name="風間 洋介" userId="a9b98ff0-f5fa-4bb4-8594-ce54d338978c" providerId="ADAL" clId="{54E13F58-F74D-4EDD-93E2-5D6766F3A879}" dt="2026-07-22T01:35:25.972" v="164" actId="478"/>
+        <pc:chgData name="風間 洋介" userId="a9b98ff0-f5fa-4bb4-8594-ce54d338978c" providerId="ADAL" clId="{54E13F58-F74D-4EDD-93E2-5D6766F3A879}" dt="2026-07-22T08:01:25.883" v="169" actId="14100"/>
         <pc:sldMasterMkLst>
           <pc:docMk/>
           <pc:sldMasterMk cId="1777607084" sldId="2147483660"/>
         </pc:sldMasterMkLst>
         <pc:sldLayoutChg chg="addSp delSp modSp mod">
-          <pc:chgData name="風間 洋介" userId="a9b98ff0-f5fa-4bb4-8594-ce54d338978c" providerId="ADAL" clId="{54E13F58-F74D-4EDD-93E2-5D6766F3A879}" dt="2026-07-22T01:35:25.972" v="164" actId="478"/>
+          <pc:chgData name="風間 洋介" userId="a9b98ff0-f5fa-4bb4-8594-ce54d338978c" providerId="ADAL" clId="{54E13F58-F74D-4EDD-93E2-5D6766F3A879}" dt="2026-07-22T08:01:25.883" v="169" actId="14100"/>
           <pc:sldLayoutMkLst>
             <pc:docMk/>
             <pc:sldMasterMk cId="1777607084" sldId="2147483660"/>
@@ -181,6 +197,15 @@
               <ac:spMk id="2" creationId="{00000000-0000-0000-0000-000000000000}"/>
             </ac:spMkLst>
           </pc:spChg>
+          <pc:spChg chg="mod">
+            <ac:chgData name="風間 洋介" userId="a9b98ff0-f5fa-4bb4-8594-ce54d338978c" providerId="ADAL" clId="{54E13F58-F74D-4EDD-93E2-5D6766F3A879}" dt="2026-07-22T08:01:25.883" v="169" actId="14100"/>
+            <ac:spMkLst>
+              <pc:docMk/>
+              <pc:sldMasterMk cId="1777607084" sldId="2147483660"/>
+              <pc:sldLayoutMk cId="2280233213" sldId="2147483661"/>
+              <ac:spMk id="2" creationId="{3F08CC13-265A-588E-5B80-D28CAA7A7FD6}"/>
+            </ac:spMkLst>
+          </pc:spChg>
           <pc:spChg chg="del">
             <ac:chgData name="風間 洋介" userId="a9b98ff0-f5fa-4bb4-8594-ce54d338978c" providerId="ADAL" clId="{54E13F58-F74D-4EDD-93E2-5D6766F3A879}" dt="2026-07-22T01:27:33.531" v="13" actId="478"/>
             <ac:spMkLst>
@@ -334,8 +359,26 @@
               <ac:spMk id="21" creationId="{D31CEDD4-0A9D-3B0C-095D-B7DC0E4B0388}"/>
             </ac:spMkLst>
           </pc:spChg>
+          <pc:picChg chg="del">
+            <ac:chgData name="風間 洋介" userId="a9b98ff0-f5fa-4bb4-8594-ce54d338978c" providerId="ADAL" clId="{54E13F58-F74D-4EDD-93E2-5D6766F3A879}" dt="2026-07-22T08:01:19.210" v="168" actId="478"/>
+            <ac:picMkLst>
+              <pc:docMk/>
+              <pc:sldMasterMk cId="1777607084" sldId="2147483660"/>
+              <pc:sldLayoutMk cId="2280233213" sldId="2147483661"/>
+              <ac:picMk id="5" creationId="{999FCD6D-BE16-4E70-7B78-F281D710DA1C}"/>
+            </ac:picMkLst>
+          </pc:picChg>
+          <pc:picChg chg="del">
+            <ac:chgData name="風間 洋介" userId="a9b98ff0-f5fa-4bb4-8594-ce54d338978c" providerId="ADAL" clId="{54E13F58-F74D-4EDD-93E2-5D6766F3A879}" dt="2026-07-22T08:01:16.973" v="167" actId="478"/>
+            <ac:picMkLst>
+              <pc:docMk/>
+              <pc:sldMasterMk cId="1777607084" sldId="2147483660"/>
+              <pc:sldLayoutMk cId="2280233213" sldId="2147483661"/>
+              <ac:picMk id="8" creationId="{34197E88-8F85-60BC-8189-4A6B88BC10C9}"/>
+            </ac:picMkLst>
+          </pc:picChg>
           <pc:picChg chg="add del mod ord">
-            <ac:chgData name="風間 洋介" userId="a9b98ff0-f5fa-4bb4-8594-ce54d338978c" providerId="ADAL" clId="{54E13F58-F74D-4EDD-93E2-5D6766F3A879}" dt="2026-07-22T01:35:25.972" v="164" actId="478"/>
+            <ac:chgData name="風間 洋介" userId="a9b98ff0-f5fa-4bb4-8594-ce54d338978c" providerId="ADAL" clId="{54E13F58-F74D-4EDD-93E2-5D6766F3A879}" dt="2026-07-22T08:01:12.286" v="166" actId="478"/>
             <ac:picMkLst>
               <pc:docMk/>
               <pc:sldMasterMk cId="1777607084" sldId="2147483660"/>
@@ -415,8 +458,8 @@
         </p:nvSpPr>
         <p:spPr>
           <a:xfrm>
-            <a:off x="301749" y="1899745"/>
-            <a:ext cx="1171946" cy="400050"/>
+            <a:off x="301748" y="1899745"/>
+            <a:ext cx="4456681" cy="400050"/>
           </a:xfrm>
         </p:spPr>
         <p:txBody>
@@ -438,6 +481,140 @@
             <a:r>
               <a:rPr kumimoji="1" lang="ja-JP" altLang="en-US" dirty="0"/>
               <a:t>エリア名</a:t>
+            </a:r>
+          </a:p>
+        </p:txBody>
+      </p:sp>
+      <p:sp>
+        <p:nvSpPr>
+          <p:cNvPr id="2" name="テキスト プレースホルダー 19">
+            <a:extLst>
+              <a:ext uri="{FF2B5EF4-FFF2-40B4-BE49-F238E27FC236}">
+                <a16:creationId xmlns:a16="http://schemas.microsoft.com/office/drawing/2014/main" id="{3F08CC13-265A-588E-5B80-D28CAA7A7FD6}"/>
+              </a:ext>
+            </a:extLst>
+          </p:cNvPr>
+          <p:cNvSpPr>
+            <a:spLocks noGrp="1"/>
+          </p:cNvSpPr>
+          <p:nvPr>
+            <p:ph type="body" sz="quarter" idx="13" hasCustomPrompt="1"/>
+          </p:nvPr>
+        </p:nvSpPr>
+        <p:spPr>
+          <a:xfrm>
+            <a:off x="4769387" y="5543822"/>
+            <a:ext cx="2987169" cy="400050"/>
+          </a:xfrm>
+        </p:spPr>
+        <p:txBody>
+          <a:bodyPr anchor="ctr">
+            <a:noAutofit/>
+          </a:bodyPr>
+          <a:lstStyle>
+            <a:lvl1pPr algn="l">
+              <a:buNone/>
+              <a:defRPr sz="700" b="0">
+                <a:solidFill>
+                  <a:schemeClr val="bg1"/>
+                </a:solidFill>
+                <a:latin typeface="Meiryo UI" panose="020B0604030504040204" pitchFamily="50" charset="-128"/>
+                <a:ea typeface="Meiryo UI" panose="020B0604030504040204" pitchFamily="50" charset="-128"/>
+              </a:defRPr>
+            </a:lvl1pPr>
+          </a:lstStyle>
+          <a:p>
+            <a:pPr lvl="0"/>
+            <a:r>
+              <a:rPr kumimoji="1" lang="en-US" altLang="ja-JP" dirty="0"/>
+              <a:t>※</a:t>
+            </a:r>
+            <a:r>
+              <a:rPr kumimoji="1" lang="ja-JP" altLang="en-US" dirty="0"/>
+              <a:t>地図、店舗状況は</a:t>
+            </a:r>
+            <a:r>
+              <a:rPr kumimoji="1" lang="en-US" altLang="ja-JP" dirty="0"/>
+              <a:t>{year}</a:t>
+            </a:r>
+            <a:r>
+              <a:rPr kumimoji="1" lang="ja-JP" altLang="en-US" dirty="0"/>
+              <a:t>年</a:t>
+            </a:r>
+            <a:r>
+              <a:rPr kumimoji="1" lang="en-US" altLang="ja-JP" dirty="0"/>
+              <a:t>{month}</a:t>
+            </a:r>
+            <a:r>
+              <a:rPr kumimoji="1" lang="ja-JP" altLang="en-US" dirty="0"/>
+              <a:t>月</a:t>
+            </a:r>
+            <a:r>
+              <a:rPr kumimoji="1" lang="en-US" altLang="ja-JP" dirty="0"/>
+              <a:t>{day}</a:t>
+            </a:r>
+            <a:r>
+              <a:rPr kumimoji="1" lang="ja-JP" altLang="en-US" dirty="0"/>
+              <a:t>時点</a:t>
+            </a:r>
+          </a:p>
+        </p:txBody>
+      </p:sp>
+      <p:sp>
+        <p:nvSpPr>
+          <p:cNvPr id="6" name="テキスト プレースホルダー 19">
+            <a:extLst>
+              <a:ext uri="{FF2B5EF4-FFF2-40B4-BE49-F238E27FC236}">
+                <a16:creationId xmlns:a16="http://schemas.microsoft.com/office/drawing/2014/main" id="{66FB71AB-5D47-1DC4-2E1D-FC1E9F4F4B11}"/>
+              </a:ext>
+            </a:extLst>
+          </p:cNvPr>
+          <p:cNvSpPr>
+            <a:spLocks noGrp="1"/>
+          </p:cNvSpPr>
+          <p:nvPr>
+            <p:ph type="body" sz="quarter" idx="14" hasCustomPrompt="1"/>
+          </p:nvPr>
+        </p:nvSpPr>
+        <p:spPr>
+          <a:xfrm>
+            <a:off x="4764780" y="5690583"/>
+            <a:ext cx="2991776" cy="400050"/>
+          </a:xfrm>
+        </p:spPr>
+        <p:txBody>
+          <a:bodyPr anchor="ctr">
+            <a:noAutofit/>
+          </a:bodyPr>
+          <a:lstStyle>
+            <a:lvl1pPr algn="l">
+              <a:buNone/>
+              <a:defRPr sz="700" b="0">
+                <a:solidFill>
+                  <a:schemeClr val="bg1"/>
+                </a:solidFill>
+                <a:latin typeface="Meiryo UI" panose="020B0604030504040204" pitchFamily="50" charset="-128"/>
+                <a:ea typeface="Meiryo UI" panose="020B0604030504040204" pitchFamily="50" charset="-128"/>
+              </a:defRPr>
+            </a:lvl1pPr>
+          </a:lstStyle>
+          <a:p>
+            <a:pPr lvl="0"/>
+            <a:r>
+              <a:rPr kumimoji="1" lang="en-US" altLang="ja-JP" dirty="0"/>
+              <a:t>※</a:t>
+            </a:r>
+            <a:r>
+              <a:rPr kumimoji="1" lang="ja-JP" altLang="en-US" dirty="0"/>
+              <a:t>地図中の園は</a:t>
+            </a:r>
+            <a:r>
+              <a:rPr kumimoji="1" lang="en-US" altLang="ja-JP" dirty="0"/>
+              <a:t>{year}</a:t>
+            </a:r>
+            <a:r>
+              <a:rPr kumimoji="1" lang="ja-JP" altLang="en-US" dirty="0"/>
+              <a:t>年に啓発活動を実施いただいた園となります</a:t>
             </a:r>
           </a:p>
         </p:txBody>
@@ -1036,10 +1213,10 @@
       </p:grpSpPr>
       <p:sp>
         <p:nvSpPr>
-          <p:cNvPr id="2" name="オンライン画像のプレースホルダー 1">
+          <p:cNvPr id="4" name="オンライン画像のプレースホルダー 3">
             <a:extLst>
               <a:ext uri="{FF2B5EF4-FFF2-40B4-BE49-F238E27FC236}">
-                <a16:creationId xmlns:a16="http://schemas.microsoft.com/office/drawing/2014/main" id="{80D8F855-64F5-6739-C3E5-35345498C79C}"/>
+                <a16:creationId xmlns:a16="http://schemas.microsoft.com/office/drawing/2014/main" id="{02DF8B8E-C8A9-84E9-4868-884B9CB6FFEA}"/>
               </a:ext>
             </a:extLst>
           </p:cNvPr>
@@ -1061,10 +1238,10 @@
       </p:sp>
       <p:sp>
         <p:nvSpPr>
-          <p:cNvPr id="3" name="テキスト プレースホルダー 2">
+          <p:cNvPr id="5" name="テキスト プレースホルダー 4">
             <a:extLst>
               <a:ext uri="{FF2B5EF4-FFF2-40B4-BE49-F238E27FC236}">
-                <a16:creationId xmlns:a16="http://schemas.microsoft.com/office/drawing/2014/main" id="{946611E3-CFC8-E660-C859-C82073BE8A94}"/>
+                <a16:creationId xmlns:a16="http://schemas.microsoft.com/office/drawing/2014/main" id="{79C27467-A56A-054B-D8E4-828C6DC56960}"/>
               </a:ext>
             </a:extLst>
           </p:cNvPr>
@@ -1075,21 +1252,125 @@
             <p:ph type="body" sz="quarter" idx="12"/>
           </p:nvPr>
         </p:nvSpPr>
-        <p:spPr>
-          <a:xfrm>
-            <a:off x="263649" y="1899745"/>
-            <a:ext cx="1171946" cy="400050"/>
-          </a:xfrm>
-        </p:spPr>
+        <p:spPr/>
         <p:txBody>
           <a:bodyPr/>
           <a:lstStyle/>
           <a:p>
-            <a:pPr algn="ctr"/>
-            <a:endParaRPr kumimoji="1" lang="ja-JP" altLang="en-US"/>
+            <a:endParaRPr lang="ja-JP" altLang="en-US"/>
           </a:p>
         </p:txBody>
       </p:sp>
+      <p:sp>
+        <p:nvSpPr>
+          <p:cNvPr id="6" name="テキスト プレースホルダー 5">
+            <a:extLst>
+              <a:ext uri="{FF2B5EF4-FFF2-40B4-BE49-F238E27FC236}">
+                <a16:creationId xmlns:a16="http://schemas.microsoft.com/office/drawing/2014/main" id="{B7A7CDB9-0D82-C962-6A58-2C92D94FFDF6}"/>
+              </a:ext>
+            </a:extLst>
+          </p:cNvPr>
+          <p:cNvSpPr>
+            <a:spLocks noGrp="1"/>
+          </p:cNvSpPr>
+          <p:nvPr>
+            <p:ph type="body" sz="quarter" idx="13"/>
+          </p:nvPr>
+        </p:nvSpPr>
+        <p:spPr/>
+        <p:txBody>
+          <a:bodyPr/>
+          <a:lstStyle/>
+          <a:p>
+            <a:endParaRPr lang="ja-JP" altLang="en-US"/>
+          </a:p>
+        </p:txBody>
+      </p:sp>
+      <p:sp>
+        <p:nvSpPr>
+          <p:cNvPr id="7" name="テキスト プレースホルダー 6">
+            <a:extLst>
+              <a:ext uri="{FF2B5EF4-FFF2-40B4-BE49-F238E27FC236}">
+                <a16:creationId xmlns:a16="http://schemas.microsoft.com/office/drawing/2014/main" id="{3313E55C-74D6-12F6-935C-B0FEF779F0F6}"/>
+              </a:ext>
+            </a:extLst>
+          </p:cNvPr>
+          <p:cNvSpPr>
+            <a:spLocks noGrp="1"/>
+          </p:cNvSpPr>
+          <p:nvPr>
+            <p:ph type="body" sz="quarter" idx="14"/>
+          </p:nvPr>
+        </p:nvSpPr>
+        <p:spPr/>
+        <p:txBody>
+          <a:bodyPr/>
+          <a:lstStyle/>
+          <a:p>
+            <a:endParaRPr lang="ja-JP" altLang="en-US"/>
+          </a:p>
+        </p:txBody>
+      </p:sp>
+      <p:pic>
+        <p:nvPicPr>
+          <p:cNvPr id="14" name="図 13">
+            <a:extLst>
+              <a:ext uri="{FF2B5EF4-FFF2-40B4-BE49-F238E27FC236}">
+                <a16:creationId xmlns:a16="http://schemas.microsoft.com/office/drawing/2014/main" id="{40F3A56A-653E-2CBA-82CD-1348EBE10A88}"/>
+              </a:ext>
+            </a:extLst>
+          </p:cNvPr>
+          <p:cNvPicPr>
+            <a:picLocks noChangeAspect="1"/>
+          </p:cNvPicPr>
+          <p:nvPr/>
+        </p:nvPicPr>
+        <p:blipFill>
+          <a:blip r:embed="rId2"/>
+          <a:stretch>
+            <a:fillRect/>
+          </a:stretch>
+        </p:blipFill>
+        <p:spPr>
+          <a:xfrm>
+            <a:off x="115410" y="2312655"/>
+            <a:ext cx="4269879" cy="365134"/>
+          </a:xfrm>
+          <a:prstGeom prst="rect">
+            <a:avLst/>
+          </a:prstGeom>
+        </p:spPr>
+      </p:pic>
+      <p:pic>
+        <p:nvPicPr>
+          <p:cNvPr id="16" name="図 15">
+            <a:extLst>
+              <a:ext uri="{FF2B5EF4-FFF2-40B4-BE49-F238E27FC236}">
+                <a16:creationId xmlns:a16="http://schemas.microsoft.com/office/drawing/2014/main" id="{6786C68E-2B60-769E-C477-504DCB6F171C}"/>
+              </a:ext>
+            </a:extLst>
+          </p:cNvPr>
+          <p:cNvPicPr>
+            <a:picLocks noChangeAspect="1"/>
+          </p:cNvPicPr>
+          <p:nvPr/>
+        </p:nvPicPr>
+        <p:blipFill>
+          <a:blip r:embed="rId2"/>
+          <a:stretch>
+            <a:fillRect/>
+          </a:stretch>
+        </p:blipFill>
+        <p:spPr>
+          <a:xfrm>
+            <a:off x="115410" y="2696838"/>
+            <a:ext cx="4269879" cy="314369"/>
+          </a:xfrm>
+          <a:prstGeom prst="rect">
+            <a:avLst/>
+          </a:prstGeom>
+        </p:spPr>
+      </p:pic>
     </p:spTree>
     <p:extLst>
       <p:ext uri="{BB962C8B-B14F-4D97-AF65-F5344CB8AC3E}">
@@ -1419,6 +1700,15 @@
 </file>
 
 <file path=customXml/item1.xml><?xml version="1.0" encoding="utf-8"?>
+<?mso-contentType ?>
+<FormTemplates xmlns="http://schemas.microsoft.com/sharepoint/v3/contenttype/forms">
+  <Display>DocumentLibraryForm</Display>
+  <Edit>DocumentLibraryForm</Edit>
+  <New>DocumentLibraryForm</New>
+</FormTemplates>
+</file>
+
+<file path=customXml/item2.xml><?xml version="1.0" encoding="utf-8"?>
 <p:properties xmlns:p="http://schemas.microsoft.com/office/2006/metadata/properties" xmlns:xsi="http://www.w3.org/2001/XMLSchema-instance" xmlns:pc="http://schemas.microsoft.com/office/infopath/2007/PartnerControls">
   <documentManagement>
     <TaxCatchAll xmlns="f6602190-a827-4772-8b2c-2ba3f8508817" xsi:nil="true"/>
@@ -1429,7 +1719,7 @@
 </p:properties>
 </file>
 
-<file path=customXml/item2.xml><?xml version="1.0" encoding="utf-8"?>
+<file path=customXml/item3.xml><?xml version="1.0" encoding="utf-8"?>
 <ct:contentTypeSchema xmlns:ct="http://schemas.microsoft.com/office/2006/metadata/contentType" xmlns:ma="http://schemas.microsoft.com/office/2006/metadata/properties/metaAttributes" ct:_="" ma:_="" ma:contentTypeName="ドキュメント" ma:contentTypeID="0x010100A7D5B86B18E0F04292473465565BF4DF" ma:contentTypeVersion="16" ma:contentTypeDescription="新しいドキュメントを作成します。" ma:contentTypeScope="" ma:versionID="b3f0fd06851a58e90851c800d9ce1f39">
   <xsd:schema xmlns:xsd="http://www.w3.org/2001/XMLSchema" xmlns:xs="http://www.w3.org/2001/XMLSchema" xmlns:p="http://schemas.microsoft.com/office/2006/metadata/properties" xmlns:ns2="ba3149e9-e93e-4707-a366-ccbc911044b2" xmlns:ns3="f6602190-a827-4772-8b2c-2ba3f8508817" targetNamespace="http://schemas.microsoft.com/office/2006/metadata/properties" ma:root="true" ma:fieldsID="34c7f120722b8c1a0d210e2aa78d1aa8" ns2:_="" ns3:_="">
     <xsd:import namespace="ba3149e9-e93e-4707-a366-ccbc911044b2"/>
@@ -1670,16 +1960,15 @@
 </ct:contentTypeSchema>
 </file>
 
-<file path=customXml/item3.xml><?xml version="1.0" encoding="utf-8"?>
-<?mso-contentType ?>
-<FormTemplates xmlns="http://schemas.microsoft.com/sharepoint/v3/contenttype/forms">
-  <Display>DocumentLibraryForm</Display>
-  <Edit>DocumentLibraryForm</Edit>
-  <New>DocumentLibraryForm</New>
-</FormTemplates>
+<file path=customXml/itemProps1.xml><?xml version="1.0" encoding="utf-8"?>
+<ds:datastoreItem xmlns:ds="http://schemas.openxmlformats.org/officeDocument/2006/customXml" ds:itemID="{C09A755E-1D95-45E9-89E4-C3EFF23EB6C0}">
+  <ds:schemaRefs>
+    <ds:schemaRef ds:uri="http://schemas.microsoft.com/sharepoint/v3/contenttype/forms"/>
+  </ds:schemaRefs>
+</ds:datastoreItem>
 </file>
 
-<file path=customXml/itemProps1.xml><?xml version="1.0" encoding="utf-8"?>
+<file path=customXml/itemProps2.xml><?xml version="1.0" encoding="utf-8"?>
 <ds:datastoreItem xmlns:ds="http://schemas.openxmlformats.org/officeDocument/2006/customXml" ds:itemID="{8E0ECD7D-3319-4687-9990-7B2F1CE63D60}">
   <ds:schemaRefs>
     <ds:schemaRef ds:uri="http://schemas.microsoft.com/office/2006/documentManagement/types"/>
@@ -1696,7 +1985,7 @@
 </ds:datastoreItem>
 </file>
 
-<file path=customXml/itemProps2.xml><?xml version="1.0" encoding="utf-8"?>
+<file path=customXml/itemProps3.xml><?xml version="1.0" encoding="utf-8"?>
 <ds:datastoreItem xmlns:ds="http://schemas.openxmlformats.org/officeDocument/2006/customXml" ds:itemID="{FC545F0A-0BAF-435B-AB56-C11CA3CC863E}">
   <ds:schemaRefs>
     <ds:schemaRef ds:uri="http://schemas.microsoft.com/office/2006/metadata/contentType"/>
@@ -1713,12 +2002,4 @@
     <ds:schemaRef ds:uri="http://schemas.microsoft.com/internal/obd"/>
   </ds:schemaRefs>
 </ds:datastoreItem>
-</file>
-
-<file path=customXml/itemProps3.xml><?xml version="1.0" encoding="utf-8"?>
-<ds:datastoreItem xmlns:ds="http://schemas.openxmlformats.org/officeDocument/2006/customXml" ds:itemID="{C09A755E-1D95-45E9-89E4-C3EFF23EB6C0}">
-  <ds:schemaRefs>
-    <ds:schemaRef ds:uri="http://schemas.microsoft.com/sharepoint/v3/contenttype/forms"/>
-  </ds:schemaRefs>
-</ds:datastoreItem>
 </file>